--- a/docs/pptx/week-1-ai-fluency.pptx
+++ b/docs/pptx/week-1-ai-fluency.pptx
@@ -9660,7 +9660,7 @@
         <p:spPr>
           <a:xfrm>
             <a:off x="868680" y="2423160"/>
-            <a:ext cx="10972800" cy="2377440"/>
+            <a:ext cx="10972800" cy="2260600"/>
           </a:xfrm>
           <a:prstGeom prst="rect">
             <a:avLst/>
@@ -9714,7 +9714,7 @@
         </p:nvSpPr>
         <p:spPr>
           <a:xfrm>
-            <a:off x="868680" y="4617720"/>
+            <a:off x="868680" y="4775200"/>
             <a:ext cx="1463040" cy="54864"/>
           </a:xfrm>
           <a:prstGeom prst="rect">
@@ -9758,7 +9758,7 @@
         </p:nvSpPr>
         <p:spPr>
           <a:xfrm>
-            <a:off x="868680" y="4892040"/>
+            <a:off x="868680" y="5049520"/>
             <a:ext cx="10058400" cy="914400"/>
           </a:xfrm>
           <a:prstGeom prst="rect">
@@ -9797,7 +9797,7 @@
         </p:nvSpPr>
         <p:spPr>
           <a:xfrm>
-            <a:off x="868680" y="5760720"/>
+            <a:off x="868680" y="5918200"/>
             <a:ext cx="10058400" cy="365760"/>
           </a:xfrm>
           <a:prstGeom prst="rect">
@@ -12337,7 +12337,7 @@
         <p:spPr>
           <a:xfrm>
             <a:off x="868680" y="1143000"/>
-            <a:ext cx="10424160" cy="1371600"/>
+            <a:ext cx="10424160" cy="731520"/>
           </a:xfrm>
           <a:prstGeom prst="rect">
             <a:avLst/>
@@ -12375,7 +12375,7 @@
         </p:nvSpPr>
         <p:spPr>
           <a:xfrm>
-            <a:off x="868680" y="1965960"/>
+            <a:off x="868680" y="2103120"/>
             <a:ext cx="4937760" cy="45720"/>
           </a:xfrm>
           <a:prstGeom prst="rect">
@@ -12419,7 +12419,7 @@
         </p:nvSpPr>
         <p:spPr>
           <a:xfrm>
-            <a:off x="868680" y="2057400"/>
+            <a:off x="868680" y="2194560"/>
             <a:ext cx="4937760" cy="365760"/>
           </a:xfrm>
           <a:prstGeom prst="rect">
@@ -12453,8 +12453,8 @@
         </p:nvSpPr>
         <p:spPr>
           <a:xfrm>
-            <a:off x="868680" y="2468880"/>
-            <a:ext cx="4937760" cy="3566160"/>
+            <a:off x="868680" y="2606040"/>
+            <a:ext cx="4937760" cy="3429000"/>
           </a:xfrm>
           <a:prstGeom prst="rect">
             <a:avLst/>
@@ -12510,7 +12510,7 @@
         </p:nvSpPr>
         <p:spPr>
           <a:xfrm>
-            <a:off x="6172200" y="1965960"/>
+            <a:off x="6172200" y="2103120"/>
             <a:ext cx="4937760" cy="45720"/>
           </a:xfrm>
           <a:prstGeom prst="rect">
@@ -12554,7 +12554,7 @@
         </p:nvSpPr>
         <p:spPr>
           <a:xfrm>
-            <a:off x="6172200" y="2057400"/>
+            <a:off x="6172200" y="2194560"/>
             <a:ext cx="4937760" cy="365760"/>
           </a:xfrm>
           <a:prstGeom prst="rect">
@@ -12588,8 +12588,8 @@
         </p:nvSpPr>
         <p:spPr>
           <a:xfrm>
-            <a:off x="6172200" y="2468880"/>
-            <a:ext cx="4937760" cy="3566160"/>
+            <a:off x="6172200" y="2606040"/>
+            <a:ext cx="4937760" cy="3429000"/>
           </a:xfrm>
           <a:prstGeom prst="rect">
             <a:avLst/>
@@ -12863,7 +12863,7 @@
         <p:spPr>
           <a:xfrm>
             <a:off x="868680" y="1143000"/>
-            <a:ext cx="10424160" cy="1371600"/>
+            <a:ext cx="10424160" cy="1021080"/>
           </a:xfrm>
           <a:prstGeom prst="rect">
             <a:avLst/>
@@ -12901,7 +12901,7 @@
         </p:nvSpPr>
         <p:spPr>
           <a:xfrm>
-            <a:off x="868680" y="1965960"/>
+            <a:off x="868680" y="2392680"/>
             <a:ext cx="4937760" cy="45720"/>
           </a:xfrm>
           <a:prstGeom prst="rect">
@@ -12945,7 +12945,7 @@
         </p:nvSpPr>
         <p:spPr>
           <a:xfrm>
-            <a:off x="868680" y="2057400"/>
+            <a:off x="868680" y="2484120"/>
             <a:ext cx="4937760" cy="365760"/>
           </a:xfrm>
           <a:prstGeom prst="rect">
@@ -12979,8 +12979,8 @@
         </p:nvSpPr>
         <p:spPr>
           <a:xfrm>
-            <a:off x="868680" y="2468880"/>
-            <a:ext cx="4937760" cy="3566160"/>
+            <a:off x="868680" y="2895600"/>
+            <a:ext cx="4937760" cy="3139440"/>
           </a:xfrm>
           <a:prstGeom prst="rect">
             <a:avLst/>
@@ -13036,7 +13036,7 @@
         </p:nvSpPr>
         <p:spPr>
           <a:xfrm>
-            <a:off x="6172200" y="1965960"/>
+            <a:off x="6172200" y="2392680"/>
             <a:ext cx="4937760" cy="45720"/>
           </a:xfrm>
           <a:prstGeom prst="rect">
@@ -13080,7 +13080,7 @@
         </p:nvSpPr>
         <p:spPr>
           <a:xfrm>
-            <a:off x="6172200" y="2057400"/>
+            <a:off x="6172200" y="2484120"/>
             <a:ext cx="4937760" cy="365760"/>
           </a:xfrm>
           <a:prstGeom prst="rect">
@@ -13114,8 +13114,8 @@
         </p:nvSpPr>
         <p:spPr>
           <a:xfrm>
-            <a:off x="6172200" y="2468880"/>
-            <a:ext cx="4937760" cy="3566160"/>
+            <a:off x="6172200" y="2895600"/>
+            <a:ext cx="4937760" cy="3139440"/>
           </a:xfrm>
           <a:prstGeom prst="rect">
             <a:avLst/>
@@ -13389,7 +13389,7 @@
         <p:spPr>
           <a:xfrm>
             <a:off x="868680" y="1143000"/>
-            <a:ext cx="10424160" cy="1371600"/>
+            <a:ext cx="10424160" cy="1021080"/>
           </a:xfrm>
           <a:prstGeom prst="rect">
             <a:avLst/>
@@ -13427,7 +13427,7 @@
         </p:nvSpPr>
         <p:spPr>
           <a:xfrm>
-            <a:off x="868680" y="1965960"/>
+            <a:off x="868680" y="2392680"/>
             <a:ext cx="4937760" cy="45720"/>
           </a:xfrm>
           <a:prstGeom prst="rect">
@@ -13471,7 +13471,7 @@
         </p:nvSpPr>
         <p:spPr>
           <a:xfrm>
-            <a:off x="868680" y="2057400"/>
+            <a:off x="868680" y="2484120"/>
             <a:ext cx="4937760" cy="365760"/>
           </a:xfrm>
           <a:prstGeom prst="rect">
@@ -13505,8 +13505,8 @@
         </p:nvSpPr>
         <p:spPr>
           <a:xfrm>
-            <a:off x="868680" y="2468880"/>
-            <a:ext cx="4937760" cy="3566160"/>
+            <a:off x="868680" y="2895600"/>
+            <a:ext cx="4937760" cy="3139440"/>
           </a:xfrm>
           <a:prstGeom prst="rect">
             <a:avLst/>
@@ -13562,7 +13562,7 @@
         </p:nvSpPr>
         <p:spPr>
           <a:xfrm>
-            <a:off x="6172200" y="1965960"/>
+            <a:off x="6172200" y="2392680"/>
             <a:ext cx="4937760" cy="45720"/>
           </a:xfrm>
           <a:prstGeom prst="rect">
@@ -13606,7 +13606,7 @@
         </p:nvSpPr>
         <p:spPr>
           <a:xfrm>
-            <a:off x="6172200" y="2057400"/>
+            <a:off x="6172200" y="2484120"/>
             <a:ext cx="4937760" cy="365760"/>
           </a:xfrm>
           <a:prstGeom prst="rect">
@@ -13640,8 +13640,8 @@
         </p:nvSpPr>
         <p:spPr>
           <a:xfrm>
-            <a:off x="6172200" y="2468880"/>
-            <a:ext cx="4937760" cy="3566160"/>
+            <a:off x="6172200" y="2895600"/>
+            <a:ext cx="4937760" cy="3139440"/>
           </a:xfrm>
           <a:prstGeom prst="rect">
             <a:avLst/>
@@ -13915,7 +13915,7 @@
         <p:spPr>
           <a:xfrm>
             <a:off x="868680" y="1143000"/>
-            <a:ext cx="10424160" cy="1463040"/>
+            <a:ext cx="10424160" cy="1089660"/>
           </a:xfrm>
           <a:prstGeom prst="rect">
             <a:avLst/>
@@ -13953,7 +13953,7 @@
         </p:nvSpPr>
         <p:spPr>
           <a:xfrm>
-            <a:off x="868680" y="1965959"/>
+            <a:off x="868680" y="2415540"/>
             <a:ext cx="10424160" cy="1691640"/>
           </a:xfrm>
           <a:prstGeom prst="rect">
@@ -14087,7 +14087,7 @@
         </p:nvSpPr>
         <p:spPr>
           <a:xfrm>
-            <a:off x="868680" y="3794759"/>
+            <a:off x="868680" y="4244340"/>
             <a:ext cx="10424160" cy="777240"/>
           </a:xfrm>
           <a:prstGeom prst="rect">
@@ -14365,7 +14365,7 @@
         <p:spPr>
           <a:xfrm>
             <a:off x="868680" y="1143000"/>
-            <a:ext cx="10424160" cy="1371600"/>
+            <a:ext cx="10424160" cy="1021080"/>
           </a:xfrm>
           <a:prstGeom prst="rect">
             <a:avLst/>
@@ -14403,7 +14403,7 @@
         </p:nvSpPr>
         <p:spPr>
           <a:xfrm>
-            <a:off x="868680" y="1965960"/>
+            <a:off x="868680" y="2392680"/>
             <a:ext cx="4937760" cy="45720"/>
           </a:xfrm>
           <a:prstGeom prst="rect">
@@ -14447,7 +14447,7 @@
         </p:nvSpPr>
         <p:spPr>
           <a:xfrm>
-            <a:off x="868680" y="2057400"/>
+            <a:off x="868680" y="2484120"/>
             <a:ext cx="4937760" cy="365760"/>
           </a:xfrm>
           <a:prstGeom prst="rect">
@@ -14481,8 +14481,8 @@
         </p:nvSpPr>
         <p:spPr>
           <a:xfrm>
-            <a:off x="868680" y="2468880"/>
-            <a:ext cx="4937760" cy="3566160"/>
+            <a:off x="868680" y="2895600"/>
+            <a:ext cx="4937760" cy="3139440"/>
           </a:xfrm>
           <a:prstGeom prst="rect">
             <a:avLst/>
@@ -14538,7 +14538,7 @@
         </p:nvSpPr>
         <p:spPr>
           <a:xfrm>
-            <a:off x="6172200" y="1965960"/>
+            <a:off x="6172200" y="2392680"/>
             <a:ext cx="4937760" cy="45720"/>
           </a:xfrm>
           <a:prstGeom prst="rect">
@@ -14582,7 +14582,7 @@
         </p:nvSpPr>
         <p:spPr>
           <a:xfrm>
-            <a:off x="6172200" y="2057400"/>
+            <a:off x="6172200" y="2484120"/>
             <a:ext cx="4937760" cy="365760"/>
           </a:xfrm>
           <a:prstGeom prst="rect">
@@ -14616,8 +14616,8 @@
         </p:nvSpPr>
         <p:spPr>
           <a:xfrm>
-            <a:off x="6172200" y="2468880"/>
-            <a:ext cx="4937760" cy="3566160"/>
+            <a:off x="6172200" y="2895600"/>
+            <a:ext cx="4937760" cy="3139440"/>
           </a:xfrm>
           <a:prstGeom prst="rect">
             <a:avLst/>
@@ -14891,7 +14891,7 @@
         <p:spPr>
           <a:xfrm>
             <a:off x="868680" y="1143000"/>
-            <a:ext cx="10424160" cy="1371600"/>
+            <a:ext cx="10424160" cy="1021080"/>
           </a:xfrm>
           <a:prstGeom prst="rect">
             <a:avLst/>
@@ -14929,7 +14929,7 @@
         </p:nvSpPr>
         <p:spPr>
           <a:xfrm>
-            <a:off x="868680" y="2468880"/>
+            <a:off x="868680" y="2392680"/>
             <a:ext cx="4937760" cy="411480"/>
           </a:xfrm>
           <a:prstGeom prst="rect">
@@ -14963,7 +14963,7 @@
         </p:nvSpPr>
         <p:spPr>
           <a:xfrm>
-            <a:off x="868680" y="2852928"/>
+            <a:off x="868680" y="2776728"/>
             <a:ext cx="4937760" cy="22860"/>
           </a:xfrm>
           <a:prstGeom prst="rect">
@@ -15007,8 +15007,8 @@
         </p:nvSpPr>
         <p:spPr>
           <a:xfrm>
-            <a:off x="868680" y="3017520"/>
-            <a:ext cx="4937760" cy="3063240"/>
+            <a:off x="868680" y="2941320"/>
+            <a:ext cx="4937760" cy="3139440"/>
           </a:xfrm>
           <a:prstGeom prst="rect">
             <a:avLst/>
@@ -15049,7 +15049,7 @@
         </p:nvSpPr>
         <p:spPr>
           <a:xfrm>
-            <a:off x="6172200" y="2468880"/>
+            <a:off x="6172200" y="2392680"/>
             <a:ext cx="4937760" cy="411480"/>
           </a:xfrm>
           <a:prstGeom prst="rect">
@@ -15083,7 +15083,7 @@
         </p:nvSpPr>
         <p:spPr>
           <a:xfrm>
-            <a:off x="6172200" y="2852928"/>
+            <a:off x="6172200" y="2776728"/>
             <a:ext cx="4937760" cy="22860"/>
           </a:xfrm>
           <a:prstGeom prst="rect">
@@ -15127,8 +15127,8 @@
         </p:nvSpPr>
         <p:spPr>
           <a:xfrm>
-            <a:off x="6172200" y="3017520"/>
-            <a:ext cx="4937760" cy="3063240"/>
+            <a:off x="6172200" y="2941320"/>
+            <a:ext cx="4937760" cy="3139440"/>
           </a:xfrm>
           <a:prstGeom prst="rect">
             <a:avLst/>
@@ -15769,7 +15769,7 @@
         <p:spPr>
           <a:xfrm>
             <a:off x="868680" y="1143000"/>
-            <a:ext cx="10424160" cy="1463040"/>
+            <a:ext cx="10424160" cy="777240"/>
           </a:xfrm>
           <a:prstGeom prst="rect">
             <a:avLst/>
@@ -15807,7 +15807,7 @@
         </p:nvSpPr>
         <p:spPr>
           <a:xfrm>
-            <a:off x="868680" y="1965959"/>
+            <a:off x="868680" y="2103120"/>
             <a:ext cx="10424160" cy="2697480"/>
           </a:xfrm>
           <a:prstGeom prst="rect">
@@ -17059,7 +17059,7 @@
         <p:spPr>
           <a:xfrm>
             <a:off x="868680" y="1143000"/>
-            <a:ext cx="10424160" cy="1463040"/>
+            <a:ext cx="10424160" cy="777240"/>
           </a:xfrm>
           <a:prstGeom prst="rect">
             <a:avLst/>
@@ -17097,7 +17097,7 @@
         </p:nvSpPr>
         <p:spPr>
           <a:xfrm>
-            <a:off x="868680" y="1965959"/>
+            <a:off x="868680" y="2103120"/>
             <a:ext cx="10424160" cy="1691640"/>
           </a:xfrm>
           <a:prstGeom prst="rect">
@@ -17249,7 +17249,7 @@
         </p:nvSpPr>
         <p:spPr>
           <a:xfrm>
-            <a:off x="868680" y="3794759"/>
+            <a:off x="868680" y="3931920"/>
             <a:ext cx="10424160" cy="777240"/>
           </a:xfrm>
           <a:prstGeom prst="rect">
@@ -17509,7 +17509,7 @@
         <p:spPr>
           <a:xfrm>
             <a:off x="868680" y="1143000"/>
-            <a:ext cx="10424160" cy="1463040"/>
+            <a:ext cx="10424160" cy="777240"/>
           </a:xfrm>
           <a:prstGeom prst="rect">
             <a:avLst/>
@@ -17547,7 +17547,7 @@
         </p:nvSpPr>
         <p:spPr>
           <a:xfrm>
-            <a:off x="868680" y="1965959"/>
+            <a:off x="868680" y="2103120"/>
             <a:ext cx="10424160" cy="2697480"/>
           </a:xfrm>
           <a:prstGeom prst="rect">
@@ -17982,7 +17982,7 @@
         <p:spPr>
           <a:xfrm>
             <a:off x="868680" y="1143000"/>
-            <a:ext cx="10424160" cy="1463040"/>
+            <a:ext cx="10424160" cy="777240"/>
           </a:xfrm>
           <a:prstGeom prst="rect">
             <a:avLst/>
@@ -18020,7 +18020,7 @@
         </p:nvSpPr>
         <p:spPr>
           <a:xfrm>
-            <a:off x="868680" y="1965959"/>
+            <a:off x="868680" y="2103120"/>
             <a:ext cx="10424160" cy="2194560"/>
           </a:xfrm>
           <a:prstGeom prst="rect">
@@ -18200,7 +18200,7 @@
         </p:nvSpPr>
         <p:spPr>
           <a:xfrm>
-            <a:off x="868680" y="4297679"/>
+            <a:off x="868680" y="4434840"/>
             <a:ext cx="10424160" cy="777240"/>
           </a:xfrm>
           <a:prstGeom prst="rect">
@@ -18460,7 +18460,7 @@
         <p:spPr>
           <a:xfrm>
             <a:off x="868680" y="1143000"/>
-            <a:ext cx="10424160" cy="1463040"/>
+            <a:ext cx="10424160" cy="1089660"/>
           </a:xfrm>
           <a:prstGeom prst="rect">
             <a:avLst/>
@@ -18498,7 +18498,7 @@
         </p:nvSpPr>
         <p:spPr>
           <a:xfrm>
-            <a:off x="868680" y="2514600"/>
+            <a:off x="868680" y="2415540"/>
             <a:ext cx="10424160" cy="2194560"/>
           </a:xfrm>
           <a:prstGeom prst="rect">
@@ -19614,7 +19614,7 @@
         <p:spPr>
           <a:xfrm>
             <a:off x="868680" y="2423160"/>
-            <a:ext cx="10972800" cy="2377440"/>
+            <a:ext cx="10972800" cy="1280160"/>
           </a:xfrm>
           <a:prstGeom prst="rect">
             <a:avLst/>
@@ -19652,7 +19652,7 @@
         </p:nvSpPr>
         <p:spPr>
           <a:xfrm>
-            <a:off x="868680" y="4617720"/>
+            <a:off x="868680" y="3794760"/>
             <a:ext cx="1463040" cy="54864"/>
           </a:xfrm>
           <a:prstGeom prst="rect">
@@ -19696,7 +19696,7 @@
         </p:nvSpPr>
         <p:spPr>
           <a:xfrm>
-            <a:off x="868680" y="4892040"/>
+            <a:off x="868680" y="4069080"/>
             <a:ext cx="10058400" cy="914400"/>
           </a:xfrm>
           <a:prstGeom prst="rect">
@@ -19735,7 +19735,7 @@
         </p:nvSpPr>
         <p:spPr>
           <a:xfrm>
-            <a:off x="868680" y="5760720"/>
+            <a:off x="868680" y="4937760"/>
             <a:ext cx="10058400" cy="365760"/>
           </a:xfrm>
           <a:prstGeom prst="rect">
@@ -22136,7 +22136,7 @@
         <p:spPr>
           <a:xfrm>
             <a:off x="868680" y="1143000"/>
-            <a:ext cx="10424160" cy="1463040"/>
+            <a:ext cx="10424160" cy="1089660"/>
           </a:xfrm>
           <a:prstGeom prst="rect">
             <a:avLst/>
@@ -22174,7 +22174,7 @@
         </p:nvSpPr>
         <p:spPr>
           <a:xfrm>
-            <a:off x="868680" y="1965959"/>
+            <a:off x="868680" y="2415540"/>
             <a:ext cx="10424160" cy="1691640"/>
           </a:xfrm>
           <a:prstGeom prst="rect">
@@ -22308,7 +22308,7 @@
         </p:nvSpPr>
         <p:spPr>
           <a:xfrm>
-            <a:off x="868680" y="3749039"/>
+            <a:off x="868680" y="4198620"/>
             <a:ext cx="10058400" cy="822960"/>
           </a:xfrm>
           <a:prstGeom prst="rect">
@@ -24848,7 +24848,7 @@
         <p:spPr>
           <a:xfrm>
             <a:off x="868680" y="1143000"/>
-            <a:ext cx="10424160" cy="1463040"/>
+            <a:ext cx="10424160" cy="1089660"/>
           </a:xfrm>
           <a:prstGeom prst="rect">
             <a:avLst/>
@@ -24886,7 +24886,7 @@
         </p:nvSpPr>
         <p:spPr>
           <a:xfrm>
-            <a:off x="868680" y="1965959"/>
+            <a:off x="868680" y="2415540"/>
             <a:ext cx="10424160" cy="1691640"/>
           </a:xfrm>
           <a:prstGeom prst="rect">
@@ -26055,7 +26055,7 @@
         <p:spPr>
           <a:xfrm>
             <a:off x="868680" y="1143000"/>
-            <a:ext cx="10424160" cy="1371600"/>
+            <a:ext cx="10424160" cy="1021080"/>
           </a:xfrm>
           <a:prstGeom prst="rect">
             <a:avLst/>
@@ -26093,7 +26093,7 @@
         </p:nvSpPr>
         <p:spPr>
           <a:xfrm>
-            <a:off x="868680" y="2468880"/>
+            <a:off x="868680" y="2392680"/>
             <a:ext cx="4937760" cy="411480"/>
           </a:xfrm>
           <a:prstGeom prst="rect">
@@ -26127,7 +26127,7 @@
         </p:nvSpPr>
         <p:spPr>
           <a:xfrm>
-            <a:off x="868680" y="2852928"/>
+            <a:off x="868680" y="2776728"/>
             <a:ext cx="4937760" cy="22860"/>
           </a:xfrm>
           <a:prstGeom prst="rect">
@@ -26171,8 +26171,8 @@
         </p:nvSpPr>
         <p:spPr>
           <a:xfrm>
-            <a:off x="868680" y="3017520"/>
-            <a:ext cx="4937760" cy="3063240"/>
+            <a:off x="868680" y="2941320"/>
+            <a:ext cx="4937760" cy="3139440"/>
           </a:xfrm>
           <a:prstGeom prst="rect">
             <a:avLst/>
@@ -26250,7 +26250,7 @@
         </p:nvSpPr>
         <p:spPr>
           <a:xfrm>
-            <a:off x="6172200" y="2468880"/>
+            <a:off x="6172200" y="2392680"/>
             <a:ext cx="4937760" cy="411480"/>
           </a:xfrm>
           <a:prstGeom prst="rect">
@@ -26284,7 +26284,7 @@
         </p:nvSpPr>
         <p:spPr>
           <a:xfrm>
-            <a:off x="6172200" y="2852928"/>
+            <a:off x="6172200" y="2776728"/>
             <a:ext cx="4937760" cy="22860"/>
           </a:xfrm>
           <a:prstGeom prst="rect">
@@ -26328,8 +26328,8 @@
         </p:nvSpPr>
         <p:spPr>
           <a:xfrm>
-            <a:off x="6172200" y="3017520"/>
-            <a:ext cx="4937760" cy="3063240"/>
+            <a:off x="6172200" y="2941320"/>
+            <a:ext cx="4937760" cy="3139440"/>
           </a:xfrm>
           <a:prstGeom prst="rect">
             <a:avLst/>
@@ -27044,7 +27044,7 @@
         <p:spPr>
           <a:xfrm>
             <a:off x="868680" y="1143000"/>
-            <a:ext cx="10424160" cy="1463040"/>
+            <a:ext cx="10424160" cy="777240"/>
           </a:xfrm>
           <a:prstGeom prst="rect">
             <a:avLst/>
@@ -27082,7 +27082,7 @@
         </p:nvSpPr>
         <p:spPr>
           <a:xfrm>
-            <a:off x="868680" y="1965959"/>
+            <a:off x="868680" y="2103120"/>
             <a:ext cx="10424160" cy="2697480"/>
           </a:xfrm>
           <a:prstGeom prst="rect">
@@ -27290,7 +27290,7 @@
         </p:nvSpPr>
         <p:spPr>
           <a:xfrm>
-            <a:off x="868680" y="4800599"/>
+            <a:off x="868680" y="4937760"/>
             <a:ext cx="10424160" cy="777240"/>
           </a:xfrm>
           <a:prstGeom prst="rect">
@@ -27550,7 +27550,7 @@
         <p:spPr>
           <a:xfrm>
             <a:off x="868680" y="1143000"/>
-            <a:ext cx="10424160" cy="1463040"/>
+            <a:ext cx="10424160" cy="1089660"/>
           </a:xfrm>
           <a:prstGeom prst="rect">
             <a:avLst/>
@@ -27588,7 +27588,7 @@
         </p:nvSpPr>
         <p:spPr>
           <a:xfrm>
-            <a:off x="868680" y="1965959"/>
+            <a:off x="868680" y="2415540"/>
             <a:ext cx="10424160" cy="2194560"/>
           </a:xfrm>
           <a:prstGeom prst="rect">
@@ -27741,7 +27741,7 @@
         </p:nvSpPr>
         <p:spPr>
           <a:xfrm>
-            <a:off x="868680" y="4297679"/>
+            <a:off x="868680" y="4747260"/>
             <a:ext cx="10424160" cy="777240"/>
           </a:xfrm>
           <a:prstGeom prst="rect">
@@ -29538,7 +29538,7 @@
         <p:spPr>
           <a:xfrm>
             <a:off x="868680" y="1143000"/>
-            <a:ext cx="10424160" cy="1371600"/>
+            <a:ext cx="10424160" cy="1021080"/>
           </a:xfrm>
           <a:prstGeom prst="rect">
             <a:avLst/>
@@ -29576,7 +29576,7 @@
         </p:nvSpPr>
         <p:spPr>
           <a:xfrm>
-            <a:off x="868680" y="1965960"/>
+            <a:off x="868680" y="2392680"/>
             <a:ext cx="4937760" cy="411480"/>
           </a:xfrm>
           <a:prstGeom prst="rect">
@@ -29610,7 +29610,7 @@
         </p:nvSpPr>
         <p:spPr>
           <a:xfrm>
-            <a:off x="868680" y="2350008"/>
+            <a:off x="868680" y="2776728"/>
             <a:ext cx="4937760" cy="22860"/>
           </a:xfrm>
           <a:prstGeom prst="rect">
@@ -29654,8 +29654,8 @@
         </p:nvSpPr>
         <p:spPr>
           <a:xfrm>
-            <a:off x="868680" y="2514600"/>
-            <a:ext cx="4937760" cy="3566160"/>
+            <a:off x="868680" y="2941320"/>
+            <a:ext cx="4937760" cy="3139440"/>
           </a:xfrm>
           <a:prstGeom prst="rect">
             <a:avLst/>
@@ -29696,7 +29696,7 @@
         </p:nvSpPr>
         <p:spPr>
           <a:xfrm>
-            <a:off x="6172200" y="1965960"/>
+            <a:off x="6172200" y="2392680"/>
             <a:ext cx="4937760" cy="411480"/>
           </a:xfrm>
           <a:prstGeom prst="rect">
@@ -29730,7 +29730,7 @@
         </p:nvSpPr>
         <p:spPr>
           <a:xfrm>
-            <a:off x="6172200" y="2350008"/>
+            <a:off x="6172200" y="2776728"/>
             <a:ext cx="4937760" cy="22860"/>
           </a:xfrm>
           <a:prstGeom prst="rect">
@@ -29774,8 +29774,8 @@
         </p:nvSpPr>
         <p:spPr>
           <a:xfrm>
-            <a:off x="6172200" y="2514600"/>
-            <a:ext cx="4937760" cy="3566160"/>
+            <a:off x="6172200" y="2941320"/>
+            <a:ext cx="4937760" cy="3139440"/>
           </a:xfrm>
           <a:prstGeom prst="rect">
             <a:avLst/>
@@ -30653,7 +30653,7 @@
         <p:spPr>
           <a:xfrm>
             <a:off x="868680" y="1143000"/>
-            <a:ext cx="10424160" cy="1463040"/>
+            <a:ext cx="10424160" cy="777240"/>
           </a:xfrm>
           <a:prstGeom prst="rect">
             <a:avLst/>
@@ -30691,7 +30691,7 @@
         </p:nvSpPr>
         <p:spPr>
           <a:xfrm>
-            <a:off x="868680" y="1965959"/>
+            <a:off x="868680" y="2103120"/>
             <a:ext cx="10424160" cy="1691640"/>
           </a:xfrm>
           <a:prstGeom prst="rect">
@@ -30843,7 +30843,7 @@
         </p:nvSpPr>
         <p:spPr>
           <a:xfrm>
-            <a:off x="868680" y="3794759"/>
+            <a:off x="868680" y="3931920"/>
             <a:ext cx="10424160" cy="777240"/>
           </a:xfrm>
           <a:prstGeom prst="rect">
@@ -32172,7 +32172,7 @@
         <p:spPr>
           <a:xfrm>
             <a:off x="868680" y="1143000"/>
-            <a:ext cx="10424160" cy="1371600"/>
+            <a:ext cx="10424160" cy="1021080"/>
           </a:xfrm>
           <a:prstGeom prst="rect">
             <a:avLst/>
@@ -32228,7 +32228,7 @@
         </p:nvSpPr>
         <p:spPr>
           <a:xfrm>
-            <a:off x="868680" y="2468880"/>
+            <a:off x="868680" y="2392680"/>
             <a:ext cx="4937760" cy="411480"/>
           </a:xfrm>
           <a:prstGeom prst="rect">
@@ -32262,7 +32262,7 @@
         </p:nvSpPr>
         <p:spPr>
           <a:xfrm>
-            <a:off x="868680" y="2852928"/>
+            <a:off x="868680" y="2776728"/>
             <a:ext cx="4937760" cy="22860"/>
           </a:xfrm>
           <a:prstGeom prst="rect">
@@ -32306,8 +32306,8 @@
         </p:nvSpPr>
         <p:spPr>
           <a:xfrm>
-            <a:off x="868680" y="3017520"/>
-            <a:ext cx="4937760" cy="3063240"/>
+            <a:off x="868680" y="2941320"/>
+            <a:ext cx="4937760" cy="3139440"/>
           </a:xfrm>
           <a:prstGeom prst="rect">
             <a:avLst/>
@@ -32385,7 +32385,7 @@
         </p:nvSpPr>
         <p:spPr>
           <a:xfrm>
-            <a:off x="6172200" y="2468880"/>
+            <a:off x="6172200" y="2392680"/>
             <a:ext cx="4937760" cy="411480"/>
           </a:xfrm>
           <a:prstGeom prst="rect">
@@ -32419,7 +32419,7 @@
         </p:nvSpPr>
         <p:spPr>
           <a:xfrm>
-            <a:off x="6172200" y="2852928"/>
+            <a:off x="6172200" y="2776728"/>
             <a:ext cx="4937760" cy="22860"/>
           </a:xfrm>
           <a:prstGeom prst="rect">
@@ -32463,8 +32463,8 @@
         </p:nvSpPr>
         <p:spPr>
           <a:xfrm>
-            <a:off x="6172200" y="3017520"/>
-            <a:ext cx="4937760" cy="3063240"/>
+            <a:off x="6172200" y="2941320"/>
+            <a:ext cx="4937760" cy="3139440"/>
           </a:xfrm>
           <a:prstGeom prst="rect">
             <a:avLst/>
@@ -34026,7 +34026,7 @@
         <p:spPr>
           <a:xfrm>
             <a:off x="868680" y="1143000"/>
-            <a:ext cx="10424160" cy="1463040"/>
+            <a:ext cx="10424160" cy="777240"/>
           </a:xfrm>
           <a:prstGeom prst="rect">
             <a:avLst/>
@@ -34064,7 +34064,7 @@
         </p:nvSpPr>
         <p:spPr>
           <a:xfrm>
-            <a:off x="868680" y="1965959"/>
+            <a:off x="868680" y="2103120"/>
             <a:ext cx="10424160" cy="2194560"/>
           </a:xfrm>
           <a:prstGeom prst="rect">
@@ -35058,7 +35058,7 @@
         <p:spPr>
           <a:xfrm>
             <a:off x="868680" y="1143000"/>
-            <a:ext cx="10424160" cy="1463040"/>
+            <a:ext cx="10424160" cy="1089660"/>
           </a:xfrm>
           <a:prstGeom prst="rect">
             <a:avLst/>
@@ -35096,7 +35096,7 @@
         </p:nvSpPr>
         <p:spPr>
           <a:xfrm>
-            <a:off x="868680" y="2514600"/>
+            <a:off x="868680" y="2415540"/>
             <a:ext cx="10424160" cy="2194560"/>
           </a:xfrm>
           <a:prstGeom prst="rect">
@@ -35303,7 +35303,7 @@
         </p:nvSpPr>
         <p:spPr>
           <a:xfrm>
-            <a:off x="868680" y="4846320"/>
+            <a:off x="868680" y="4747260"/>
             <a:ext cx="10424160" cy="777240"/>
           </a:xfrm>
           <a:prstGeom prst="rect">
